--- a/manuscript/ha_figures.pptx
+++ b/manuscript/ha_figures.pptx
@@ -3266,7 +3266,7 @@
           <a:p>
             <a:r>
               <a:rPr sz="1400"/>
-              <a:t>Biennial physician growth against lagged litigation exposure measured as (a) counts and (b) rates.</a:t>
+              <a:t>Biennial physician growth against lagged litigation exposure measured as (a) counts and (b) rates. Points are coloured by specialty; the count panel shows the size confounding that the rate panel removes.</a:t>
             </a:r>
           </a:p>
         </p:txBody>

--- a/manuscript/ha_figures.pptx
+++ b/manuscript/ha_figures.pptx
@@ -7,6 +7,7 @@
   <p:sldIdLst>
     <p:sldId id="256" r:id="rId7"/>
     <p:sldId id="257" r:id="rId8"/>
+    <p:sldId id="258" r:id="rId9"/>
   </p:sldIdLst>
   <p:sldSz cx="12191695" cy="6858000" type="screen4x3"/>
   <p:notesSz cx="6858000" cy="9144000"/>
@@ -3267,6 +3268,106 @@
             <a:r>
               <a:rPr sz="1400"/>
               <a:t>Biennial physician growth against lagged litigation exposure measured as (a) counts and (b) rates. Points are coloured by specialty; the count panel shows the size confounding that the rate panel removes.</a:t>
+            </a:r>
+          </a:p>
+        </p:txBody>
+      </p:sp>
+    </p:spTree>
+  </p:cSld>
+  <p:clrMapOvr>
+    <a:masterClrMapping/>
+  </p:clrMapOvr>
+</p:sld>
+</file>
+
+<file path=ppt/slides/slide3.xml><?xml version="1.0" encoding="utf-8"?>
+<p:sld xmlns:a="http://schemas.openxmlformats.org/drawingml/2006/main" xmlns:p="http://schemas.openxmlformats.org/presentationml/2006/main" xmlns:r="http://schemas.openxmlformats.org/officeDocument/2006/relationships">
+  <p:cSld>
+    <p:spTree>
+      <p:nvGrpSpPr>
+        <p:cNvPr id="1" name=""/>
+        <p:cNvGrpSpPr/>
+        <p:nvPr/>
+      </p:nvGrpSpPr>
+      <p:grpSpPr/>
+      <p:sp>
+        <p:nvSpPr>
+          <p:cNvPr id="2" name="TextBox 1"/>
+          <p:cNvSpPr txBox="1"/>
+          <p:nvPr/>
+        </p:nvSpPr>
+        <p:spPr>
+          <a:xfrm>
+            <a:off x="457200" y="182880"/>
+            <a:ext cx="11247120" cy="640080"/>
+          </a:xfrm>
+          <a:prstGeom prst="rect">
+            <a:avLst/>
+          </a:prstGeom>
+          <a:noFill/>
+        </p:spPr>
+        <p:txBody>
+          <a:bodyPr wrap="none">
+            <a:spAutoFit/>
+          </a:bodyPr>
+          <a:lstStyle/>
+          <a:p>
+            <a:r>
+              <a:rPr sz="2400" b="1"/>
+              <a:t>Figure 3</a:t>
+            </a:r>
+          </a:p>
+        </p:txBody>
+      </p:sp>
+      <p:pic>
+        <p:nvPicPr>
+          <p:cNvPr id="3" name="Picture 2" descr="ha_Figure_3.png"/>
+          <p:cNvPicPr>
+            <a:picLocks noChangeAspect="1"/>
+          </p:cNvPicPr>
+          <p:nvPr/>
+        </p:nvPicPr>
+        <p:blipFill>
+          <a:blip r:embed="rId2"/>
+          <a:stretch>
+            <a:fillRect/>
+          </a:stretch>
+        </p:blipFill>
+        <p:spPr>
+          <a:xfrm>
+            <a:off x="1097280" y="1005840"/>
+            <a:ext cx="10460736" cy="4754880"/>
+          </a:xfrm>
+          <a:prstGeom prst="rect">
+            <a:avLst/>
+          </a:prstGeom>
+        </p:spPr>
+      </p:pic>
+      <p:sp>
+        <p:nvSpPr>
+          <p:cNvPr id="4" name="TextBox 3"/>
+          <p:cNvSpPr txBox="1"/>
+          <p:nvPr/>
+        </p:nvSpPr>
+        <p:spPr>
+          <a:xfrm>
+            <a:off x="457200" y="5943600"/>
+            <a:ext cx="11247120" cy="822960"/>
+          </a:xfrm>
+          <a:prstGeom prst="rect">
+            <a:avLst/>
+          </a:prstGeom>
+          <a:noFill/>
+        </p:spPr>
+        <p:txBody>
+          <a:bodyPr wrap="square">
+            <a:spAutoFit/>
+          </a:bodyPr>
+          <a:lstStyle/>
+          <a:p>
+            <a:r>
+              <a:rPr sz="1400"/>
+              <a:t>Counterfactual policy-lever simulation: marginal 10-year change in physician counts by specialty relative to the projected baseline drift. The MDE benchmark is the minimum detectable per-SD effect from the primary analysis.</a:t>
             </a:r>
           </a:p>
         </p:txBody>

--- a/manuscript/ha_figures.pptx
+++ b/manuscript/ha_figures.pptx
@@ -8,6 +8,7 @@
     <p:sldId id="256" r:id="rId7"/>
     <p:sldId id="257" r:id="rId8"/>
     <p:sldId id="258" r:id="rId9"/>
+    <p:sldId id="259" r:id="rId10"/>
   </p:sldIdLst>
   <p:sldSz cx="12191695" cy="6858000" type="screen4x3"/>
   <p:notesSz cx="6858000" cy="9144000"/>
@@ -3322,6 +3323,106 @@
       <p:pic>
         <p:nvPicPr>
           <p:cNvPr id="3" name="Picture 2" descr="ha_Figure_3.png"/>
+          <p:cNvPicPr>
+            <a:picLocks noChangeAspect="1"/>
+          </p:cNvPicPr>
+          <p:nvPr/>
+        </p:nvPicPr>
+        <p:blipFill>
+          <a:blip r:embed="rId2"/>
+          <a:stretch>
+            <a:fillRect/>
+          </a:stretch>
+        </p:blipFill>
+        <p:spPr>
+          <a:xfrm>
+            <a:off x="1097280" y="1005840"/>
+            <a:ext cx="10460736" cy="4754880"/>
+          </a:xfrm>
+          <a:prstGeom prst="rect">
+            <a:avLst/>
+          </a:prstGeom>
+        </p:spPr>
+      </p:pic>
+      <p:sp>
+        <p:nvSpPr>
+          <p:cNvPr id="4" name="TextBox 3"/>
+          <p:cNvSpPr txBox="1"/>
+          <p:nvPr/>
+        </p:nvSpPr>
+        <p:spPr>
+          <a:xfrm>
+            <a:off x="457200" y="5943600"/>
+            <a:ext cx="11247120" cy="822960"/>
+          </a:xfrm>
+          <a:prstGeom prst="rect">
+            <a:avLst/>
+          </a:prstGeom>
+          <a:noFill/>
+        </p:spPr>
+        <p:txBody>
+          <a:bodyPr wrap="square">
+            <a:spAutoFit/>
+          </a:bodyPr>
+          <a:lstStyle/>
+          <a:p>
+            <a:r>
+              <a:rPr sz="1400"/>
+              <a:t>Biennial hospital growth against lagged litigation exposure measured as (a) counts and (b) rates. Points are coloured by specialty; the rate-adjusted panel shows no systematic association.</a:t>
+            </a:r>
+          </a:p>
+        </p:txBody>
+      </p:sp>
+    </p:spTree>
+  </p:cSld>
+  <p:clrMapOvr>
+    <a:masterClrMapping/>
+  </p:clrMapOvr>
+</p:sld>
+</file>
+
+<file path=ppt/slides/slide4.xml><?xml version="1.0" encoding="utf-8"?>
+<p:sld xmlns:a="http://schemas.openxmlformats.org/drawingml/2006/main" xmlns:p="http://schemas.openxmlformats.org/presentationml/2006/main" xmlns:r="http://schemas.openxmlformats.org/officeDocument/2006/relationships">
+  <p:cSld>
+    <p:spTree>
+      <p:nvGrpSpPr>
+        <p:cNvPr id="1" name=""/>
+        <p:cNvGrpSpPr/>
+        <p:nvPr/>
+      </p:nvGrpSpPr>
+      <p:grpSpPr/>
+      <p:sp>
+        <p:nvSpPr>
+          <p:cNvPr id="2" name="TextBox 1"/>
+          <p:cNvSpPr txBox="1"/>
+          <p:nvPr/>
+        </p:nvSpPr>
+        <p:spPr>
+          <a:xfrm>
+            <a:off x="457200" y="182880"/>
+            <a:ext cx="11247120" cy="640080"/>
+          </a:xfrm>
+          <a:prstGeom prst="rect">
+            <a:avLst/>
+          </a:prstGeom>
+          <a:noFill/>
+        </p:spPr>
+        <p:txBody>
+          <a:bodyPr wrap="none">
+            <a:spAutoFit/>
+          </a:bodyPr>
+          <a:lstStyle/>
+          <a:p>
+            <a:r>
+              <a:rPr sz="2400" b="1"/>
+              <a:t>Figure 4</a:t>
+            </a:r>
+          </a:p>
+        </p:txBody>
+      </p:sp>
+      <p:pic>
+        <p:nvPicPr>
+          <p:cNvPr id="3" name="Picture 2" descr="ha_Figure_4.png"/>
           <p:cNvPicPr>
             <a:picLocks noChangeAspect="1"/>
           </p:cNvPicPr>

--- a/manuscript/ha_figures.pptx
+++ b/manuscript/ha_figures.pptx
@@ -3168,7 +3168,7 @@
           <a:p>
             <a:r>
               <a:rPr sz="1400"/>
-              <a:t>Equivalence (TOST) of the litigation-rate effect against ±1% and ±2% margins; horizontal bars are 90% confidence intervals.</a:t>
+              <a:t>Equivalence (TOST) of the litigation-rate effect against +/-1% and +/-2% margins; horizontal bars are 90% confidence intervals.</a:t>
             </a:r>
           </a:p>
         </p:txBody>

--- a/manuscript/ha_figures.pptx
+++ b/manuscript/ha_figures.pptx
@@ -333,7 +333,7 @@
           <a:p>
             <a:fld id="{C1FF6DA9-008F-8B48-92A6-B652298478BF}" type="slidenum">
               <a:rPr lang="en-US" smtClean="0"/>
-              <a:t>‹#›</a:t>
+              <a:t>#</a:t>
             </a:fld>
             <a:endParaRPr lang="en-US"/>
           </a:p>
@@ -503,7 +503,7 @@
           <a:p>
             <a:fld id="{C1FF6DA9-008F-8B48-92A6-B652298478BF}" type="slidenum">
               <a:rPr lang="en-US" smtClean="0"/>
-              <a:t>‹#›</a:t>
+              <a:t>#</a:t>
             </a:fld>
             <a:endParaRPr lang="en-US"/>
           </a:p>
@@ -683,7 +683,7 @@
           <a:p>
             <a:fld id="{C1FF6DA9-008F-8B48-92A6-B652298478BF}" type="slidenum">
               <a:rPr lang="en-US" smtClean="0"/>
-              <a:t>‹#›</a:t>
+              <a:t>#</a:t>
             </a:fld>
             <a:endParaRPr lang="en-US"/>
           </a:p>
@@ -853,7 +853,7 @@
           <a:p>
             <a:fld id="{C1FF6DA9-008F-8B48-92A6-B652298478BF}" type="slidenum">
               <a:rPr lang="en-US" smtClean="0"/>
-              <a:t>‹#›</a:t>
+              <a:t>#</a:t>
             </a:fld>
             <a:endParaRPr lang="en-US"/>
           </a:p>
@@ -1099,7 +1099,7 @@
           <a:p>
             <a:fld id="{C1FF6DA9-008F-8B48-92A6-B652298478BF}" type="slidenum">
               <a:rPr lang="en-US" smtClean="0"/>
-              <a:t>‹#›</a:t>
+              <a:t>#</a:t>
             </a:fld>
             <a:endParaRPr lang="en-US"/>
           </a:p>
@@ -1387,7 +1387,7 @@
           <a:p>
             <a:fld id="{C1FF6DA9-008F-8B48-92A6-B652298478BF}" type="slidenum">
               <a:rPr lang="en-US" smtClean="0"/>
-              <a:t>‹#›</a:t>
+              <a:t>#</a:t>
             </a:fld>
             <a:endParaRPr lang="en-US"/>
           </a:p>
@@ -1809,7 +1809,7 @@
           <a:p>
             <a:fld id="{C1FF6DA9-008F-8B48-92A6-B652298478BF}" type="slidenum">
               <a:rPr lang="en-US" smtClean="0"/>
-              <a:t>‹#›</a:t>
+              <a:t>#</a:t>
             </a:fld>
             <a:endParaRPr lang="en-US"/>
           </a:p>
@@ -1927,7 +1927,7 @@
           <a:p>
             <a:fld id="{C1FF6DA9-008F-8B48-92A6-B652298478BF}" type="slidenum">
               <a:rPr lang="en-US" smtClean="0"/>
-              <a:t>‹#›</a:t>
+              <a:t>#</a:t>
             </a:fld>
             <a:endParaRPr lang="en-US"/>
           </a:p>
@@ -2022,7 +2022,7 @@
           <a:p>
             <a:fld id="{C1FF6DA9-008F-8B48-92A6-B652298478BF}" type="slidenum">
               <a:rPr lang="en-US" smtClean="0"/>
-              <a:t>‹#›</a:t>
+              <a:t>#</a:t>
             </a:fld>
             <a:endParaRPr lang="en-US"/>
           </a:p>
@@ -2299,7 +2299,7 @@
           <a:p>
             <a:fld id="{C1FF6DA9-008F-8B48-92A6-B652298478BF}" type="slidenum">
               <a:rPr lang="en-US" smtClean="0"/>
-              <a:t>‹#›</a:t>
+              <a:t>#</a:t>
             </a:fld>
             <a:endParaRPr lang="en-US"/>
           </a:p>
@@ -2552,7 +2552,7 @@
           <a:p>
             <a:fld id="{C1FF6DA9-008F-8B48-92A6-B652298478BF}" type="slidenum">
               <a:rPr lang="en-US" smtClean="0"/>
-              <a:t>‹#›</a:t>
+              <a:t>#</a:t>
             </a:fld>
             <a:endParaRPr lang="en-US"/>
           </a:p>
@@ -2801,7 +2801,7 @@
           <a:p>
             <a:fld id="{C1FF6DA9-008F-8B48-92A6-B652298478BF}" type="slidenum">
               <a:rPr lang="en-US" smtClean="0"/>
-              <a:t>‹#›</a:t>
+              <a:t>#</a:t>
             </a:fld>
             <a:endParaRPr lang="en-US"/>
           </a:p>
@@ -2851,7 +2851,7 @@
           <a:spcPct val="20000"/>
         </a:spcBef>
         <a:buFont typeface="Arial"/>
-        <a:buChar char="•"/>
+        <a:buChar char="*"/>
         <a:defRPr sz="3200" kern="1200">
           <a:solidFill>
             <a:schemeClr val="tx1"/>
@@ -2866,7 +2866,7 @@
           <a:spcPct val="20000"/>
         </a:spcBef>
         <a:buFont typeface="Arial"/>
-        <a:buChar char="–"/>
+        <a:buChar char="-"/>
         <a:defRPr sz="2800" kern="1200">
           <a:solidFill>
             <a:schemeClr val="tx1"/>
@@ -2881,7 +2881,7 @@
           <a:spcPct val="20000"/>
         </a:spcBef>
         <a:buFont typeface="Arial"/>
-        <a:buChar char="•"/>
+        <a:buChar char="*"/>
         <a:defRPr sz="2400" kern="1200">
           <a:solidFill>
             <a:schemeClr val="tx1"/>
@@ -2896,7 +2896,7 @@
           <a:spcPct val="20000"/>
         </a:spcBef>
         <a:buFont typeface="Arial"/>
-        <a:buChar char="–"/>
+        <a:buChar char="-"/>
         <a:defRPr sz="2000" kern="1200">
           <a:solidFill>
             <a:schemeClr val="tx1"/>
@@ -2911,7 +2911,7 @@
           <a:spcPct val="20000"/>
         </a:spcBef>
         <a:buFont typeface="Arial"/>
-        <a:buChar char="»"/>
+        <a:buChar char="&gt;&gt;"/>
         <a:defRPr sz="2000" kern="1200">
           <a:solidFill>
             <a:schemeClr val="tx1"/>
@@ -2926,7 +2926,7 @@
           <a:spcPct val="20000"/>
         </a:spcBef>
         <a:buFont typeface="Arial"/>
-        <a:buChar char="•"/>
+        <a:buChar char="*"/>
         <a:defRPr sz="2000" kern="1200">
           <a:solidFill>
             <a:schemeClr val="tx1"/>
@@ -2941,7 +2941,7 @@
           <a:spcPct val="20000"/>
         </a:spcBef>
         <a:buFont typeface="Arial"/>
-        <a:buChar char="•"/>
+        <a:buChar char="*"/>
         <a:defRPr sz="2000" kern="1200">
           <a:solidFill>
             <a:schemeClr val="tx1"/>
@@ -2956,7 +2956,7 @@
           <a:spcPct val="20000"/>
         </a:spcBef>
         <a:buFont typeface="Arial"/>
-        <a:buChar char="•"/>
+        <a:buChar char="*"/>
         <a:defRPr sz="2000" kern="1200">
           <a:solidFill>
             <a:schemeClr val="tx1"/>
@@ -2971,7 +2971,7 @@
           <a:spcPct val="20000"/>
         </a:spcBef>
         <a:buFont typeface="Arial"/>
-        <a:buChar char="•"/>
+        <a:buChar char="*"/>
         <a:defRPr sz="2000" kern="1200">
           <a:solidFill>
             <a:schemeClr val="tx1"/>
@@ -3527,10 +3527,10 @@
         <a:latin typeface="Calibri"/>
         <a:ea typeface=""/>
         <a:cs typeface=""/>
-        <a:font script="Jpan" typeface="ＭＳ Ｐゴシック"/>
-        <a:font script="Hang" typeface="맑은 고딕"/>
-        <a:font script="Hans" typeface="宋体"/>
-        <a:font script="Hant" typeface="新細明體"/>
+        <a:font script="Jpan" typeface="MS PGothic"/>
+        <a:font script="Hang" typeface="Malgun Gothic"/>
+        <a:font script="Hans" typeface="SimSun"/>
+        <a:font script="Hant" typeface="PMingLiU"/>
         <a:font script="Arab" typeface="Times New Roman"/>
         <a:font script="Hebr" typeface="Times New Roman"/>
         <a:font script="Thai" typeface="Angsana New"/>
@@ -3562,10 +3562,10 @@
         <a:latin typeface="Calibri"/>
         <a:ea typeface=""/>
         <a:cs typeface=""/>
-        <a:font script="Jpan" typeface="ＭＳ Ｐゴシック"/>
-        <a:font script="Hang" typeface="맑은 고딕"/>
-        <a:font script="Hans" typeface="宋体"/>
-        <a:font script="Hant" typeface="新細明體"/>
+        <a:font script="Jpan" typeface="MS PGothic"/>
+        <a:font script="Hang" typeface="Malgun Gothic"/>
+        <a:font script="Hans" typeface="SimSun"/>
+        <a:font script="Hant" typeface="PMingLiU"/>
         <a:font script="Arab" typeface="Arial"/>
         <a:font script="Hebr" typeface="Arial"/>
         <a:font script="Thai" typeface="Cordia New"/>

--- a/manuscript/ha_figures.pptx
+++ b/manuscript/ha_figures.pptx
@@ -3368,7 +3368,7 @@
           <a:p>
             <a:r>
               <a:rPr sz="1400"/>
-              <a:t>Biennial hospital growth against lagged litigation exposure measured as (a) counts and (b) rates. Points are coloured by specialty; the rate-adjusted panel shows no systematic association.</a:t>
+              <a:t>Biennial hospital facility-count growth against lagged litigation exposure measured as (a) counts and (b) rates. Points are coloured by specialty; the rate-adjusted panel shows no systematic association.</a:t>
             </a:r>
           </a:p>
         </p:txBody>

--- a/manuscript/ha_figures.pptx
+++ b/manuscript/ha_figures.pptx
@@ -3468,7 +3468,7 @@
           <a:p>
             <a:r>
               <a:rPr sz="1400"/>
-              <a:t>Counterfactual policy-lever simulation: marginal 10-year change in physician counts by specialty relative to the projected baseline drift. The MDE benchmark is the minimum detectable per-SD effect from the primary analysis.</a:t>
+              <a:t>Counterfactual policy-instrument simulation: marginal 10-year change in physician counts by specialty relative to the projected baseline drift. The MDE benchmark is the minimum detectable per-SD effect from the primary analysis.</a:t>
             </a:r>
           </a:p>
         </p:txBody>

--- a/manuscript/ha_figures.pptx
+++ b/manuscript/ha_figures.pptx
@@ -2911,7 +2911,7 @@
           <a:spcPct val="20000"/>
         </a:spcBef>
         <a:buFont typeface="Arial"/>
-        <a:buChar char="&gt;&gt;"/>
+        <a:buChar char="»"/>
         <a:defRPr sz="2000" kern="1200">
           <a:solidFill>
             <a:schemeClr val="tx1"/>
